--- a/sample-packs/Ma'am Cora/Grade 6 - English - Writing a persuasive notice for a clean barangay/Slides.pptx
+++ b/sample-packs/Ma'am Cora/Grade 6 - English - Writing a persuasive notice for a clean barangay/Slides.pptx
@@ -151,16 +151,6 @@
                 </a:solidFill>
               </a:rPr>
               <a:t>Learners write a short persuasive notice that asks neighbours to segregate waste, using reasons and a call to action.</a:t>
-            </a:r>
-          </a:p>
-          <a:p>
-            <a:r>
-              <a:rPr lang="en-US" sz="2400">
-                <a:solidFill>
-                  <a:srgbClr val="332C27"/>
-                </a:solidFill>
-              </a:rPr>
-              <a:t>Fictional placeholder made by the CherIt team for a hackathon demonstration.</a:t>
             </a:r>
           </a:p>
         </p:txBody>
